--- a/examples/style-test/style-test.pptx
+++ b/examples/style-test/style-test.pptx
@@ -1408,8 +1408,8 @@
         </p:nvSpPr>
         <p:spPr>
           <a:xfrm>
-            <a:off x="6096000" y="3056382"/>
-            <a:ext cx="2635250" cy="457200"/>
+            <a:off x="5335651" y="2713482"/>
+            <a:ext cx="3978275" cy="546100"/>
           </a:xfrm>
           <a:custGeom>
             <a:avLst/>
@@ -1420,10 +1420,10 @@
             <a:pathLst>
               <a:path w="100000" h="100000" fill="none">
                 <a:moveTo>
+                  <a:pt x="89823" y="0"/>
+                </a:moveTo>
+                <a:lnTo>
                   <a:pt x="100000" y="0"/>
-                </a:moveTo>
-                <a:lnTo>
-                  <a:pt x="100000" y="88528"/>
                 </a:lnTo>
                 <a:lnTo>
                   <a:pt x="100000" y="100000"/>
@@ -1432,10 +1432,10 @@
                   <a:pt x="0" y="100000"/>
                 </a:lnTo>
                 <a:lnTo>
-                  <a:pt x="0" y="88528"/>
-                </a:lnTo>
-                <a:lnTo>
                   <a:pt x="0" y="0"/>
+                </a:lnTo>
+                <a:lnTo>
+                  <a:pt x="10174" y="0"/>
                 </a:lnTo>
               </a:path>
             </a:pathLst>
@@ -1586,7 +1586,7 @@
         </p:nvSpPr>
         <p:spPr>
           <a:xfrm>
-            <a:off x="7175500" y="3213100"/>
+            <a:off x="7086600" y="2959100"/>
             <a:ext cx="482600" cy="203200"/>
           </a:xfrm>
           <a:prstGeom prst="rect">

--- a/examples/style-test/style-test.pptx
+++ b/examples/style-test/style-test.pptx
@@ -1409,7 +1409,7 @@
         <p:spPr>
           <a:xfrm>
             <a:off x="5335651" y="2713482"/>
-            <a:ext cx="3978275" cy="546100"/>
+            <a:ext cx="3978275" cy="876300"/>
           </a:xfrm>
           <a:custGeom>
             <a:avLst/>
@@ -1586,7 +1586,7 @@
         </p:nvSpPr>
         <p:spPr>
           <a:xfrm>
-            <a:off x="7086600" y="2959100"/>
+            <a:off x="7086600" y="3289300"/>
             <a:ext cx="482600" cy="203200"/>
           </a:xfrm>
           <a:prstGeom prst="rect">
